--- a/data/urok4/slaydy_urok4.pptx
+++ b/data/urok4/slaydy_urok4.pptx
@@ -29,6 +29,10 @@
     <p:sldId id="277" r:id="rId29"/>
     <p:sldId id="278" r:id="rId30"/>
     <p:sldId id="279" r:id="rId31"/>
+    <p:sldId id="280" r:id="rId32"/>
+    <p:sldId id="281" r:id="rId33"/>
+    <p:sldId id="282" r:id="rId34"/>
+    <p:sldId id="283" r:id="rId35"/>
   </p:sldIdLst>
   <p:sldSz cx="12192000" cy="6858000" type="screen4x3"/>
   <p:notesSz cx="6858000" cy="9144000"/>
@@ -595,7 +599,7 @@
           <a:lstStyle/>
           <a:p>
             <a:r>
-              <a:t>Слайд 08. Куда попадает запрос. Пояснение — на странице урока и в конспекте.</a:t>
+              <a:t>Слайд 27. Роль в промпте: для чего она нужна. Пояснение — на странице урока и в конспекте.</a:t>
             </a:r>
           </a:p>
         </p:txBody>
@@ -665,7 +669,7 @@
           <a:lstStyle/>
           <a:p>
             <a:r>
-              <a:t>Слайд 09. Настройки в трёх моделях. Пояснение — на странице урока и в конспекте.</a:t>
+              <a:t>Слайд 08. Куда попадает запрос. Пояснение — на странице урока и в конспекте.</a:t>
             </a:r>
           </a:p>
         </p:txBody>
@@ -735,7 +739,7 @@
           <a:lstStyle/>
           <a:p>
             <a:r>
-              <a:t>Слайд 10. Паспорт безопасной задачи. Пояснение — на странице урока и в конспекте.</a:t>
+              <a:t>Слайд 09. Настройки в трёх моделях. Пояснение — на странице урока и в конспекте.</a:t>
             </a:r>
           </a:p>
         </p:txBody>
@@ -805,7 +809,7 @@
           <a:lstStyle/>
           <a:p>
             <a:r>
-              <a:t>Слайд 22. Открытие пары 2. Пояснение — на странице урока и в конспекте.</a:t>
+              <a:t>Слайд 10. Паспорт безопасной задачи. Пояснение — на странице урока и в конспекте.</a:t>
             </a:r>
           </a:p>
         </p:txBody>
@@ -875,7 +879,7 @@
           <a:lstStyle/>
           <a:p>
             <a:r>
-              <a:t>Слайд 11. Кому принадлежит результат ИИ. Пояснение — на странице урока и в конспекте.</a:t>
+              <a:t>Слайд 22. Открытие пары 2. Пояснение — на странице урока и в конспекте.</a:t>
             </a:r>
           </a:p>
         </p:txBody>
@@ -945,7 +949,7 @@
           <a:lstStyle/>
           <a:p>
             <a:r>
-              <a:t>Слайд 12. Светофор использования материала. Пояснение — на странице урока и в конспекте.</a:t>
+              <a:t>Слайд 11. Кому принадлежит результат ИИ. Пояснение — на странице урока и в конспекте.</a:t>
             </a:r>
           </a:p>
         </p:txBody>
@@ -1015,7 +1019,7 @@
           <a:lstStyle/>
           <a:p>
             <a:r>
-              <a:t>Слайд 13. Как ИИ ошибается. Пояснение — на странице урока и в конспекте.</a:t>
+              <a:t>Слайд 12. Светофор использования материала. Пояснение — на странице урока и в конспекте.</a:t>
             </a:r>
           </a:p>
         </p:txBody>
@@ -1085,7 +1089,7 @@
           <a:lstStyle/>
           <a:p>
             <a:r>
-              <a:t>Слайд 14. Как проверить факт: четыре шага. Пояснение — на странице урока и в конспекте.</a:t>
+              <a:t>Слайд 13. Как ИИ ошибается. Пояснение — на странице урока и в конспекте.</a:t>
             </a:r>
           </a:p>
         </p:txBody>
@@ -1155,7 +1159,7 @@
           <a:lstStyle/>
           <a:p>
             <a:r>
-              <a:t>Слайд 15. Откуда берётся предвзятость. Пояснение — на странице урока и в конспекте.</a:t>
+              <a:t>Слайд 14. Как проверить факт: четыре шага. Пояснение — на странице урока и в конспекте.</a:t>
             </a:r>
           </a:p>
         </p:txBody>
@@ -1225,7 +1229,7 @@
           <a:lstStyle/>
           <a:p>
             <a:r>
-              <a:t>Слайд 16. Тест «поменяй одну деталь». Пояснение — на странице урока и в конспекте.</a:t>
+              <a:t>Слайд 15. Откуда берётся предвзятость. Пояснение — на странице урока и в конспекте.</a:t>
             </a:r>
           </a:p>
         </p:txBody>
@@ -1365,7 +1369,7 @@
           <a:lstStyle/>
           <a:p>
             <a:r>
-              <a:t>Слайд 17. Что умеют подделывать. Пояснение — на странице урока и в конспекте.</a:t>
+              <a:t>Слайд 16. Тест «поменяй одну деталь». Пояснение — на странице урока и в конспекте.</a:t>
             </a:r>
           </a:p>
         </p:txBody>
@@ -1435,7 +1439,7 @@
           <a:lstStyle/>
           <a:p>
             <a:r>
-              <a:t>Слайд 18. Проверка поручения. Пояснение — на странице урока и в конспекте.</a:t>
+              <a:t>Слайд 17. Что умеют подделывать. Пояснение — на странице урока и в конспекте.</a:t>
             </a:r>
           </a:p>
         </p:txBody>
@@ -1505,7 +1509,7 @@
           <a:lstStyle/>
           <a:p>
             <a:r>
-              <a:t>Слайд 19. Цепочка ответственности. Пояснение — на странице урока и в конспекте.</a:t>
+              <a:t>Слайд 18. Проверка поручения. Пояснение — на странице урока и в конспекте.</a:t>
             </a:r>
           </a:p>
         </p:txBody>
@@ -1575,7 +1579,7 @@
           <a:lstStyle/>
           <a:p>
             <a:r>
-              <a:t>Слайд 20. Пять проверок результата ИИ. Пояснение — на странице урока и в конспекте.</a:t>
+              <a:t>Слайд 24. Каталог подделок и вредоносных сценариев. Пояснение — на странице урока и в конспекте.</a:t>
             </a:r>
           </a:p>
         </p:txBody>
@@ -1645,7 +1649,287 @@
           <a:lstStyle/>
           <a:p>
             <a:r>
+              <a:t>Слайд 25. Инструкция внутри файла. Пояснение — на странице урока и в конспекте.</a:t>
+            </a:r>
+          </a:p>
+        </p:txBody>
+      </p:sp>
+      <p:sp>
+        <p:nvSpPr>
+          <p:cNvPr id="4" name="Slide Number Placeholder 3"/>
+          <p:cNvSpPr>
+            <a:spLocks noGrp="1"/>
+          </p:cNvSpPr>
+          <p:nvPr>
+            <p:ph type="sldNum" idx="5" sz="quarter"/>
+          </p:nvPr>
+        </p:nvSpPr>
+        <p:spPr/>
+      </p:sp>
+    </p:spTree>
+  </p:cSld>
+  <p:clrMapOvr>
+    <a:masterClrMapping/>
+  </p:clrMapOvr>
+</p:notes>
+</file>
+
+<file path=ppt/notesSlides/notesSlide25.xml><?xml version="1.0" encoding="utf-8"?>
+<p:notes xmlns:a="http://schemas.openxmlformats.org/drawingml/2006/main" xmlns:p="http://schemas.openxmlformats.org/presentationml/2006/main" xmlns:r="http://schemas.openxmlformats.org/officeDocument/2006/relationships">
+  <p:cSld>
+    <p:spTree>
+      <p:nvGrpSpPr>
+        <p:cNvPr id="1" name=""/>
+        <p:cNvGrpSpPr/>
+        <p:nvPr/>
+      </p:nvGrpSpPr>
+      <p:grpSpPr>
+        <a:xfrm>
+          <a:off x="0" y="0"/>
+          <a:ext cx="0" cy="0"/>
+          <a:chOff x="0" y="0"/>
+          <a:chExt cx="0" cy="0"/>
+        </a:xfrm>
+      </p:grpSpPr>
+      <p:sp>
+        <p:nvSpPr>
+          <p:cNvPr id="2" name="Slide Image Placeholder 1"/>
+          <p:cNvSpPr>
+            <a:spLocks noGrp="1"/>
+          </p:cNvSpPr>
+          <p:nvPr>
+            <p:ph type="sldImg" idx="2"/>
+          </p:nvPr>
+        </p:nvSpPr>
+        <p:spPr/>
+      </p:sp>
+      <p:sp>
+        <p:nvSpPr>
+          <p:cNvPr id="3" name="Notes Placeholder 2"/>
+          <p:cNvSpPr>
+            <a:spLocks noGrp="1"/>
+          </p:cNvSpPr>
+          <p:nvPr>
+            <p:ph type="body" idx="3" sz="quarter"/>
+          </p:nvPr>
+        </p:nvSpPr>
+        <p:spPr/>
+        <p:txBody>
+          <a:bodyPr/>
+          <a:lstStyle/>
+          <a:p>
+            <a:r>
+              <a:t>Слайд 19. Цепочка ответственности. Пояснение — на странице урока и в конспекте.</a:t>
+            </a:r>
+          </a:p>
+        </p:txBody>
+      </p:sp>
+      <p:sp>
+        <p:nvSpPr>
+          <p:cNvPr id="4" name="Slide Number Placeholder 3"/>
+          <p:cNvSpPr>
+            <a:spLocks noGrp="1"/>
+          </p:cNvSpPr>
+          <p:nvPr>
+            <p:ph type="sldNum" idx="5" sz="quarter"/>
+          </p:nvPr>
+        </p:nvSpPr>
+        <p:spPr/>
+      </p:sp>
+    </p:spTree>
+  </p:cSld>
+  <p:clrMapOvr>
+    <a:masterClrMapping/>
+  </p:clrMapOvr>
+</p:notes>
+</file>
+
+<file path=ppt/notesSlides/notesSlide26.xml><?xml version="1.0" encoding="utf-8"?>
+<p:notes xmlns:a="http://schemas.openxmlformats.org/drawingml/2006/main" xmlns:p="http://schemas.openxmlformats.org/presentationml/2006/main" xmlns:r="http://schemas.openxmlformats.org/officeDocument/2006/relationships">
+  <p:cSld>
+    <p:spTree>
+      <p:nvGrpSpPr>
+        <p:cNvPr id="1" name=""/>
+        <p:cNvGrpSpPr/>
+        <p:nvPr/>
+      </p:nvGrpSpPr>
+      <p:grpSpPr>
+        <a:xfrm>
+          <a:off x="0" y="0"/>
+          <a:ext cx="0" cy="0"/>
+          <a:chOff x="0" y="0"/>
+          <a:chExt cx="0" cy="0"/>
+        </a:xfrm>
+      </p:grpSpPr>
+      <p:sp>
+        <p:nvSpPr>
+          <p:cNvPr id="2" name="Slide Image Placeholder 1"/>
+          <p:cNvSpPr>
+            <a:spLocks noGrp="1"/>
+          </p:cNvSpPr>
+          <p:nvPr>
+            <p:ph type="sldImg" idx="2"/>
+          </p:nvPr>
+        </p:nvSpPr>
+        <p:spPr/>
+      </p:sp>
+      <p:sp>
+        <p:nvSpPr>
+          <p:cNvPr id="3" name="Notes Placeholder 2"/>
+          <p:cNvSpPr>
+            <a:spLocks noGrp="1"/>
+          </p:cNvSpPr>
+          <p:nvPr>
+            <p:ph type="body" idx="3" sz="quarter"/>
+          </p:nvPr>
+        </p:nvSpPr>
+        <p:spPr/>
+        <p:txBody>
+          <a:bodyPr/>
+          <a:lstStyle/>
+          <a:p>
+            <a:r>
+              <a:t>Слайд 20. Пять проверок результата ИИ. Пояснение — на странице урока и в конспекте.</a:t>
+            </a:r>
+          </a:p>
+        </p:txBody>
+      </p:sp>
+      <p:sp>
+        <p:nvSpPr>
+          <p:cNvPr id="4" name="Slide Number Placeholder 3"/>
+          <p:cNvSpPr>
+            <a:spLocks noGrp="1"/>
+          </p:cNvSpPr>
+          <p:nvPr>
+            <p:ph type="sldNum" idx="5" sz="quarter"/>
+          </p:nvPr>
+        </p:nvSpPr>
+        <p:spPr/>
+      </p:sp>
+    </p:spTree>
+  </p:cSld>
+  <p:clrMapOvr>
+    <a:masterClrMapping/>
+  </p:clrMapOvr>
+</p:notes>
+</file>
+
+<file path=ppt/notesSlides/notesSlide27.xml><?xml version="1.0" encoding="utf-8"?>
+<p:notes xmlns:a="http://schemas.openxmlformats.org/drawingml/2006/main" xmlns:p="http://schemas.openxmlformats.org/presentationml/2006/main" xmlns:r="http://schemas.openxmlformats.org/officeDocument/2006/relationships">
+  <p:cSld>
+    <p:spTree>
+      <p:nvGrpSpPr>
+        <p:cNvPr id="1" name=""/>
+        <p:cNvGrpSpPr/>
+        <p:nvPr/>
+      </p:nvGrpSpPr>
+      <p:grpSpPr>
+        <a:xfrm>
+          <a:off x="0" y="0"/>
+          <a:ext cx="0" cy="0"/>
+          <a:chOff x="0" y="0"/>
+          <a:chExt cx="0" cy="0"/>
+        </a:xfrm>
+      </p:grpSpPr>
+      <p:sp>
+        <p:nvSpPr>
+          <p:cNvPr id="2" name="Slide Image Placeholder 1"/>
+          <p:cNvSpPr>
+            <a:spLocks noGrp="1"/>
+          </p:cNvSpPr>
+          <p:nvPr>
+            <p:ph type="sldImg" idx="2"/>
+          </p:nvPr>
+        </p:nvSpPr>
+        <p:spPr/>
+      </p:sp>
+      <p:sp>
+        <p:nvSpPr>
+          <p:cNvPr id="3" name="Notes Placeholder 2"/>
+          <p:cNvSpPr>
+            <a:spLocks noGrp="1"/>
+          </p:cNvSpPr>
+          <p:nvPr>
+            <p:ph type="body" idx="3" sz="quarter"/>
+          </p:nvPr>
+        </p:nvSpPr>
+        <p:spPr/>
+        <p:txBody>
+          <a:bodyPr/>
+          <a:lstStyle/>
+          <a:p>
+            <a:r>
               <a:t>Слайд 23. Итог урока и домашнее задание. Пояснение — на странице урока и в конспекте.</a:t>
+            </a:r>
+          </a:p>
+        </p:txBody>
+      </p:sp>
+      <p:sp>
+        <p:nvSpPr>
+          <p:cNvPr id="4" name="Slide Number Placeholder 3"/>
+          <p:cNvSpPr>
+            <a:spLocks noGrp="1"/>
+          </p:cNvSpPr>
+          <p:nvPr>
+            <p:ph type="sldNum" idx="5" sz="quarter"/>
+          </p:nvPr>
+        </p:nvSpPr>
+        <p:spPr/>
+      </p:sp>
+    </p:spTree>
+  </p:cSld>
+  <p:clrMapOvr>
+    <a:masterClrMapping/>
+  </p:clrMapOvr>
+</p:notes>
+</file>
+
+<file path=ppt/notesSlides/notesSlide28.xml><?xml version="1.0" encoding="utf-8"?>
+<p:notes xmlns:a="http://schemas.openxmlformats.org/drawingml/2006/main" xmlns:p="http://schemas.openxmlformats.org/presentationml/2006/main" xmlns:r="http://schemas.openxmlformats.org/officeDocument/2006/relationships">
+  <p:cSld>
+    <p:spTree>
+      <p:nvGrpSpPr>
+        <p:cNvPr id="1" name=""/>
+        <p:cNvGrpSpPr/>
+        <p:nvPr/>
+      </p:nvGrpSpPr>
+      <p:grpSpPr>
+        <a:xfrm>
+          <a:off x="0" y="0"/>
+          <a:ext cx="0" cy="0"/>
+          <a:chOff x="0" y="0"/>
+          <a:chExt cx="0" cy="0"/>
+        </a:xfrm>
+      </p:grpSpPr>
+      <p:sp>
+        <p:nvSpPr>
+          <p:cNvPr id="2" name="Slide Image Placeholder 1"/>
+          <p:cNvSpPr>
+            <a:spLocks noGrp="1"/>
+          </p:cNvSpPr>
+          <p:nvPr>
+            <p:ph type="sldImg" idx="2"/>
+          </p:nvPr>
+        </p:nvSpPr>
+        <p:spPr/>
+      </p:sp>
+      <p:sp>
+        <p:nvSpPr>
+          <p:cNvPr id="3" name="Notes Placeholder 2"/>
+          <p:cNvSpPr>
+            <a:spLocks noGrp="1"/>
+          </p:cNvSpPr>
+          <p:nvPr>
+            <p:ph type="body" idx="3" sz="quarter"/>
+          </p:nvPr>
+        </p:nvSpPr>
+        <p:spPr/>
+        <p:txBody>
+          <a:bodyPr/>
+          <a:lstStyle/>
+          <a:p>
+            <a:r>
+              <a:t>Слайд 26. Практикум: порядок работы. Пояснение — на странице урока и в конспекте.</a:t>
             </a:r>
           </a:p>
         </p:txBody>
@@ -5845,6 +6129,174 @@
 </p:sld>
 </file>
 
+<file path=ppt/slides/slide25.xml><?xml version="1.0" encoding="utf-8"?>
+<p:sld xmlns:a="http://schemas.openxmlformats.org/drawingml/2006/main" xmlns:p="http://schemas.openxmlformats.org/presentationml/2006/main" xmlns:r="http://schemas.openxmlformats.org/officeDocument/2006/relationships">
+  <p:cSld>
+    <p:spTree>
+      <p:nvGrpSpPr>
+        <p:cNvPr id="1" name=""/>
+        <p:cNvGrpSpPr/>
+        <p:nvPr/>
+      </p:nvGrpSpPr>
+      <p:grpSpPr/>
+      <p:pic>
+        <p:nvPicPr>
+          <p:cNvPr id="2" name="Picture 1" descr="image.jpg"/>
+          <p:cNvPicPr>
+            <a:picLocks noChangeAspect="1"/>
+          </p:cNvPicPr>
+          <p:nvPr/>
+        </p:nvPicPr>
+        <p:blipFill>
+          <a:blip r:embed="rId2"/>
+          <a:stretch>
+            <a:fillRect/>
+          </a:stretch>
+        </p:blipFill>
+        <p:spPr>
+          <a:xfrm>
+            <a:off x="0" y="0"/>
+            <a:ext cx="12192000" cy="6858000"/>
+          </a:xfrm>
+          <a:prstGeom prst="rect">
+            <a:avLst/>
+          </a:prstGeom>
+        </p:spPr>
+      </p:pic>
+    </p:spTree>
+  </p:cSld>
+  <p:clrMapOvr>
+    <a:masterClrMapping/>
+  </p:clrMapOvr>
+</p:sld>
+</file>
+
+<file path=ppt/slides/slide26.xml><?xml version="1.0" encoding="utf-8"?>
+<p:sld xmlns:a="http://schemas.openxmlformats.org/drawingml/2006/main" xmlns:p="http://schemas.openxmlformats.org/presentationml/2006/main" xmlns:r="http://schemas.openxmlformats.org/officeDocument/2006/relationships">
+  <p:cSld>
+    <p:spTree>
+      <p:nvGrpSpPr>
+        <p:cNvPr id="1" name=""/>
+        <p:cNvGrpSpPr/>
+        <p:nvPr/>
+      </p:nvGrpSpPr>
+      <p:grpSpPr/>
+      <p:pic>
+        <p:nvPicPr>
+          <p:cNvPr id="2" name="Picture 1" descr="image.jpg"/>
+          <p:cNvPicPr>
+            <a:picLocks noChangeAspect="1"/>
+          </p:cNvPicPr>
+          <p:nvPr/>
+        </p:nvPicPr>
+        <p:blipFill>
+          <a:blip r:embed="rId2"/>
+          <a:stretch>
+            <a:fillRect/>
+          </a:stretch>
+        </p:blipFill>
+        <p:spPr>
+          <a:xfrm>
+            <a:off x="0" y="0"/>
+            <a:ext cx="12192000" cy="6858000"/>
+          </a:xfrm>
+          <a:prstGeom prst="rect">
+            <a:avLst/>
+          </a:prstGeom>
+        </p:spPr>
+      </p:pic>
+    </p:spTree>
+  </p:cSld>
+  <p:clrMapOvr>
+    <a:masterClrMapping/>
+  </p:clrMapOvr>
+</p:sld>
+</file>
+
+<file path=ppt/slides/slide27.xml><?xml version="1.0" encoding="utf-8"?>
+<p:sld xmlns:a="http://schemas.openxmlformats.org/drawingml/2006/main" xmlns:p="http://schemas.openxmlformats.org/presentationml/2006/main" xmlns:r="http://schemas.openxmlformats.org/officeDocument/2006/relationships">
+  <p:cSld>
+    <p:spTree>
+      <p:nvGrpSpPr>
+        <p:cNvPr id="1" name=""/>
+        <p:cNvGrpSpPr/>
+        <p:nvPr/>
+      </p:nvGrpSpPr>
+      <p:grpSpPr/>
+      <p:pic>
+        <p:nvPicPr>
+          <p:cNvPr id="2" name="Picture 1" descr="image.jpg"/>
+          <p:cNvPicPr>
+            <a:picLocks noChangeAspect="1"/>
+          </p:cNvPicPr>
+          <p:nvPr/>
+        </p:nvPicPr>
+        <p:blipFill>
+          <a:blip r:embed="rId2"/>
+          <a:stretch>
+            <a:fillRect/>
+          </a:stretch>
+        </p:blipFill>
+        <p:spPr>
+          <a:xfrm>
+            <a:off x="0" y="0"/>
+            <a:ext cx="12192000" cy="6858000"/>
+          </a:xfrm>
+          <a:prstGeom prst="rect">
+            <a:avLst/>
+          </a:prstGeom>
+        </p:spPr>
+      </p:pic>
+    </p:spTree>
+  </p:cSld>
+  <p:clrMapOvr>
+    <a:masterClrMapping/>
+  </p:clrMapOvr>
+</p:sld>
+</file>
+
+<file path=ppt/slides/slide28.xml><?xml version="1.0" encoding="utf-8"?>
+<p:sld xmlns:a="http://schemas.openxmlformats.org/drawingml/2006/main" xmlns:p="http://schemas.openxmlformats.org/presentationml/2006/main" xmlns:r="http://schemas.openxmlformats.org/officeDocument/2006/relationships">
+  <p:cSld>
+    <p:spTree>
+      <p:nvGrpSpPr>
+        <p:cNvPr id="1" name=""/>
+        <p:cNvGrpSpPr/>
+        <p:nvPr/>
+      </p:nvGrpSpPr>
+      <p:grpSpPr/>
+      <p:pic>
+        <p:nvPicPr>
+          <p:cNvPr id="2" name="Picture 1" descr="image.jpg"/>
+          <p:cNvPicPr>
+            <a:picLocks noChangeAspect="1"/>
+          </p:cNvPicPr>
+          <p:nvPr/>
+        </p:nvPicPr>
+        <p:blipFill>
+          <a:blip r:embed="rId2"/>
+          <a:stretch>
+            <a:fillRect/>
+          </a:stretch>
+        </p:blipFill>
+        <p:spPr>
+          <a:xfrm>
+            <a:off x="0" y="0"/>
+            <a:ext cx="12192000" cy="6858000"/>
+          </a:xfrm>
+          <a:prstGeom prst="rect">
+            <a:avLst/>
+          </a:prstGeom>
+        </p:spPr>
+      </p:pic>
+    </p:spTree>
+  </p:cSld>
+  <p:clrMapOvr>
+    <a:masterClrMapping/>
+  </p:clrMapOvr>
+</p:sld>
+</file>
+
 <file path=ppt/slides/slide3.xml><?xml version="1.0" encoding="utf-8"?>
 <p:sld xmlns:a="http://schemas.openxmlformats.org/drawingml/2006/main" xmlns:p="http://schemas.openxmlformats.org/presentationml/2006/main" xmlns:r="http://schemas.openxmlformats.org/officeDocument/2006/relationships">
   <p:cSld>
